--- a/docs/etl/FedProspect-Data-Flows.pptx
+++ b/docs/etl/FedProspect-Data-Flows.pptx
@@ -11,6 +11,7 @@
     <p:sldId id="259" r:id="rId10"/>
     <p:sldId id="260" r:id="rId11"/>
     <p:sldId id="261" r:id="rId12"/>
+    <p:sldId id="262" r:id="rId13"/>
   </p:sldIdLst>
   <p:sldSz cx="12191695" cy="6858000" type="screen4x3"/>
   <p:notesSz cx="6858000" cy="9144000"/>
@@ -5267,7 +5268,7 @@
               </a:defRPr>
             </a:pPr>
             <a:r>
-              <a:t>On-Demand Loading (UI-Triggered)</a:t>
+              <a:t>Description Backfill Pipeline</a:t>
             </a:r>
           </a:p>
         </p:txBody>
@@ -5296,7 +5297,7 @@
           <a:p>
             <a:pPr>
               <a:lnSpc>
-                <a:spcPts val="1959"/>
+                <a:spcPts val="1690"/>
               </a:lnSpc>
               <a:spcBef>
                 <a:spcPts val="1400"/>
@@ -5314,34 +5315,124 @@
           <a:p>
             <a:pPr>
               <a:lnSpc>
-                <a:spcPts val="1959"/>
-              </a:lnSpc>
-              <a:defRPr sz="1400">
-                <a:solidFill>
-                  <a:srgbClr val="1A1A1A"/>
-                </a:solidFill>
-              </a:defRPr>
-            </a:pPr>
-          </a:p>
-          <a:p>
-            <a:pPr>
-              <a:lnSpc>
-                <a:spcPts val="1959"/>
-              </a:lnSpc>
-              <a:defRPr sz="1400">
-                <a:solidFill>
-                  <a:srgbClr val="1A1A1A"/>
-                </a:solidFill>
-              </a:defRPr>
-            </a:pPr>
-            <a:r>
-              <a:t>React UI button click  --&gt;  C# API POST /data-load-requests</a:t>
+                <a:spcPts val="1690"/>
+              </a:lnSpc>
+              <a:defRPr sz="1300">
+                <a:solidFill>
+                  <a:srgbClr val="1A1A1A"/>
+                </a:solidFill>
+              </a:defRPr>
+            </a:pPr>
+          </a:p>
+          <a:p>
+            <a:pPr>
+              <a:lnSpc>
+                <a:spcPts val="1690"/>
+              </a:lnSpc>
+              <a:defRPr sz="1300">
+                <a:solidFill>
+                  <a:srgbClr val="1A1A1A"/>
+                </a:solidFill>
+              </a:defRPr>
+            </a:pPr>
+            <a:r>
+              <a:t>CLI: update fetch-descriptions  --&gt;  Query opportunity table (description_text IS NULL)</a:t>
             </a:r>
           </a:p>
           <a:p>
             <a:pPr lvl="1">
               <a:lnSpc>
-                <a:spcPts val="1959"/>
+                <a:spcPts val="1690"/>
+              </a:lnSpc>
+              <a:defRPr sz="1200">
+                <a:solidFill>
+                  <a:srgbClr val="1A1A1A"/>
+                </a:solidFill>
+              </a:defRPr>
+            </a:pPr>
+            <a:r>
+              <a:t>--&gt; Two-pass priority:</a:t>
+            </a:r>
+          </a:p>
+          <a:p>
+            <a:pPr lvl="1">
+              <a:lnSpc>
+                <a:spcPts val="1690"/>
+              </a:lnSpc>
+              <a:defRPr sz="1200">
+                <a:solidFill>
+                  <a:srgbClr val="1A1A1A"/>
+                </a:solidFill>
+              </a:defRPr>
+            </a:pPr>
+            <a:r>
+              <a:t>Pass 1: WOSB/8(a)/SBA + target NAICS (high-value opportunities first)</a:t>
+            </a:r>
+          </a:p>
+          <a:p>
+            <a:pPr lvl="1">
+              <a:lnSpc>
+                <a:spcPts val="1690"/>
+              </a:lnSpc>
+              <a:defRPr sz="1200">
+                <a:solidFill>
+                  <a:srgbClr val="1A1A1A"/>
+                </a:solidFill>
+              </a:defRPr>
+            </a:pPr>
+            <a:r>
+              <a:t>Pass 2: General backlog (remaining budget)</a:t>
+            </a:r>
+          </a:p>
+          <a:p>
+            <a:pPr lvl="1">
+              <a:lnSpc>
+                <a:spcPts val="1690"/>
+              </a:lnSpc>
+              <a:defRPr sz="1200">
+                <a:solidFill>
+                  <a:srgbClr val="1A1A1A"/>
+                </a:solidFill>
+              </a:defRPr>
+            </a:pPr>
+            <a:r>
+              <a:t>--&gt; GET description_url from SAM.gov (1 API call per opportunity)</a:t>
+            </a:r>
+          </a:p>
+          <a:p>
+            <a:pPr lvl="1">
+              <a:lnSpc>
+                <a:spcPts val="1690"/>
+              </a:lnSpc>
+              <a:defRPr sz="1200">
+                <a:solidFill>
+                  <a:srgbClr val="1A1A1A"/>
+                </a:solidFill>
+              </a:defRPr>
+            </a:pPr>
+            <a:r>
+              <a:t>--&gt; Parse HTML response to plain text</a:t>
+            </a:r>
+          </a:p>
+          <a:p>
+            <a:pPr lvl="1">
+              <a:lnSpc>
+                <a:spcPts val="1690"/>
+              </a:lnSpc>
+              <a:defRPr sz="1200">
+                <a:solidFill>
+                  <a:srgbClr val="1A1A1A"/>
+                </a:solidFill>
+              </a:defRPr>
+            </a:pPr>
+            <a:r>
+              <a:t>--&gt; UPDATE opportunity.description_text + description_fetched_at</a:t>
+            </a:r>
+          </a:p>
+          <a:p>
+            <a:pPr>
+              <a:lnSpc>
+                <a:spcPts val="1690"/>
               </a:lnSpc>
               <a:defRPr sz="1300">
                 <a:solidFill>
@@ -5349,116 +5440,11 @@
                 </a:solidFill>
               </a:defRPr>
             </a:pPr>
-            <a:r>
-              <a:t>--&gt; INSERT into data_load_request (status = PENDING)</a:t>
-            </a:r>
-          </a:p>
-          <a:p>
-            <a:pPr lvl="1">
-              <a:lnSpc>
-                <a:spcPts val="1959"/>
-              </a:lnSpc>
-              <a:defRPr sz="1300">
-                <a:solidFill>
-                  <a:srgbClr val="1A1A1A"/>
-                </a:solidFill>
-              </a:defRPr>
-            </a:pPr>
-            <a:r>
-              <a:t>--&gt; Python DemandLoader polls for PENDING rows (up to 10 per cycle)</a:t>
-            </a:r>
-          </a:p>
-          <a:p>
-            <a:pPr lvl="1">
-              <a:lnSpc>
-                <a:spcPts val="1959"/>
-              </a:lnSpc>
-              <a:defRPr sz="1300">
-                <a:solidFill>
-                  <a:srgbClr val="1A1A1A"/>
-                </a:solidFill>
-              </a:defRPr>
-            </a:pPr>
-            <a:r>
-              <a:t>--&gt; Route to appropriate loader based on request_type:</a:t>
-            </a:r>
-          </a:p>
-          <a:p>
-            <a:pPr lvl="1">
-              <a:lnSpc>
-                <a:spcPts val="1959"/>
-              </a:lnSpc>
-              <a:defRPr sz="1300">
-                <a:solidFill>
-                  <a:srgbClr val="1A1A1A"/>
-                </a:solidFill>
-              </a:defRPr>
-            </a:pPr>
-            <a:r>
-              <a:t>USASPENDING_AWARD  --&gt;  USASpendingClient + USASpendingLoader</a:t>
-            </a:r>
-          </a:p>
-          <a:p>
-            <a:pPr lvl="1">
-              <a:lnSpc>
-                <a:spcPts val="1959"/>
-              </a:lnSpc>
-              <a:defRPr sz="1300">
-                <a:solidFill>
-                  <a:srgbClr val="1A1A1A"/>
-                </a:solidFill>
-              </a:defRPr>
-            </a:pPr>
-            <a:r>
-              <a:t>FPDS_AWARD         --&gt;  SAMAwardsClient (key 2) + AwardsLoader</a:t>
-            </a:r>
-          </a:p>
-          <a:p>
-            <a:pPr lvl="1">
-              <a:lnSpc>
-                <a:spcPts val="1959"/>
-              </a:lnSpc>
-              <a:defRPr sz="1300">
-                <a:solidFill>
-                  <a:srgbClr val="1A1A1A"/>
-                </a:solidFill>
-              </a:defRPr>
-            </a:pPr>
-            <a:r>
-              <a:t>--&gt; UPDATE data_load_request (status = COMPLETED / FAILED)</a:t>
-            </a:r>
-          </a:p>
-          <a:p>
-            <a:pPr lvl="1">
-              <a:lnSpc>
-                <a:spcPts val="1959"/>
-              </a:lnSpc>
-              <a:defRPr sz="1300">
-                <a:solidFill>
-                  <a:srgbClr val="1A1A1A"/>
-                </a:solidFill>
-              </a:defRPr>
-            </a:pPr>
-            <a:r>
-              <a:t>--&gt; UI notification on completion</a:t>
-            </a:r>
-          </a:p>
-          <a:p>
-            <a:pPr>
-              <a:lnSpc>
-                <a:spcPts val="1959"/>
-              </a:lnSpc>
-              <a:defRPr sz="1400">
-                <a:solidFill>
-                  <a:srgbClr val="1A1A1A"/>
-                </a:solidFill>
-              </a:defRPr>
-            </a:pPr>
-          </a:p>
-          <a:p>
-            <a:pPr>
-              <a:lnSpc>
-                <a:spcPts val="1959"/>
+          </a:p>
+          <a:p>
+            <a:pPr>
+              <a:lnSpc>
+                <a:spcPts val="1690"/>
               </a:lnSpc>
               <a:spcBef>
                 <a:spcPts val="1400"/>
@@ -5476,106 +5462,106 @@
           <a:p>
             <a:pPr>
               <a:lnSpc>
-                <a:spcPts val="1959"/>
-              </a:lnSpc>
-              <a:defRPr sz="1400">
-                <a:solidFill>
-                  <a:srgbClr val="1A1A1A"/>
-                </a:solidFill>
-              </a:defRPr>
-            </a:pPr>
-          </a:p>
-          <a:p>
-            <a:pPr>
-              <a:lnSpc>
-                <a:spcPts val="1959"/>
-              </a:lnSpc>
-              <a:defRPr sz="1400">
-                <a:solidFill>
-                  <a:srgbClr val="1A1A1A"/>
-                </a:solidFill>
-              </a:defRPr>
-            </a:pPr>
-            <a:r>
-              <a:t>Request table:    data_load_request (PK: request_id)</a:t>
-            </a:r>
-          </a:p>
-          <a:p>
-            <a:pPr>
-              <a:lnSpc>
-                <a:spcPts val="1959"/>
-              </a:lnSpc>
-              <a:defRPr sz="1400">
-                <a:solidFill>
-                  <a:srgbClr val="1A1A1A"/>
-                </a:solidFill>
-              </a:defRPr>
-            </a:pPr>
-            <a:r>
-              <a:t>Status values:    PENDING -&gt; PROCESSING -&gt; COMPLETED | FAILED</a:t>
-            </a:r>
-          </a:p>
-          <a:p>
-            <a:pPr>
-              <a:lnSpc>
-                <a:spcPts val="1959"/>
-              </a:lnSpc>
-              <a:defRPr sz="1400">
-                <a:solidFill>
-                  <a:srgbClr val="1A1A1A"/>
-                </a:solidFill>
-              </a:defRPr>
-            </a:pPr>
-            <a:r>
-              <a:t>Polling:          Python CLI process, periodic poll cycle</a:t>
-            </a:r>
-          </a:p>
-          <a:p>
-            <a:pPr>
-              <a:lnSpc>
-                <a:spcPts val="1959"/>
-              </a:lnSpc>
-              <a:defRPr sz="1400">
-                <a:solidFill>
-                  <a:srgbClr val="1A1A1A"/>
-                </a:solidFill>
-              </a:defRPr>
-            </a:pPr>
-            <a:r>
-              <a:t>API key:          Uses SAM.gov API key 2 (1000/day limit) for FPDS lookups</a:t>
-            </a:r>
-          </a:p>
-          <a:p>
-            <a:pPr>
-              <a:lnSpc>
-                <a:spcPts val="1959"/>
-              </a:lnSpc>
-              <a:defRPr sz="1400">
-                <a:solidFill>
-                  <a:srgbClr val="1A1A1A"/>
-                </a:solidFill>
-              </a:defRPr>
-            </a:pPr>
-            <a:r>
-              <a:t>CLI command:      python main.py demand process</a:t>
-            </a:r>
-          </a:p>
-          <a:p>
-            <a:pPr>
-              <a:lnSpc>
-                <a:spcPts val="1959"/>
-              </a:lnSpc>
-              <a:defRPr sz="1400">
-                <a:solidFill>
-                  <a:srgbClr val="1A1A1A"/>
-                </a:solidFill>
-              </a:defRPr>
-            </a:pPr>
-          </a:p>
-          <a:p>
-            <a:pPr>
-              <a:lnSpc>
-                <a:spcPts val="1959"/>
+                <a:spcPts val="1690"/>
+              </a:lnSpc>
+              <a:defRPr sz="1300">
+                <a:solidFill>
+                  <a:srgbClr val="1A1A1A"/>
+                </a:solidFill>
+              </a:defRPr>
+            </a:pPr>
+          </a:p>
+          <a:p>
+            <a:pPr>
+              <a:lnSpc>
+                <a:spcPts val="1690"/>
+              </a:lnSpc>
+              <a:defRPr sz="1300">
+                <a:solidFill>
+                  <a:srgbClr val="1A1A1A"/>
+                </a:solidFill>
+              </a:defRPr>
+            </a:pPr>
+            <a:r>
+              <a:t>Source:           SAM.gov Opportunity Description URLs (individual GET requests)</a:t>
+            </a:r>
+          </a:p>
+          <a:p>
+            <a:pPr>
+              <a:lnSpc>
+                <a:spcPts val="1690"/>
+              </a:lnSpc>
+              <a:defRPr sz="1300">
+                <a:solidFill>
+                  <a:srgbClr val="1A1A1A"/>
+                </a:solidFill>
+              </a:defRPr>
+            </a:pPr>
+            <a:r>
+              <a:t>Target column:    opportunity.description_text (+ description_fetched_at)</a:t>
+            </a:r>
+          </a:p>
+          <a:p>
+            <a:pPr>
+              <a:lnSpc>
+                <a:spcPts val="1690"/>
+              </a:lnSpc>
+              <a:defRPr sz="1300">
+                <a:solidFill>
+                  <a:srgbClr val="1A1A1A"/>
+                </a:solidFill>
+              </a:defRPr>
+            </a:pPr>
+            <a:r>
+              <a:t>API key:          Key 2 (1,000/day), 1 call per description</a:t>
+            </a:r>
+          </a:p>
+          <a:p>
+            <a:pPr>
+              <a:lnSpc>
+                <a:spcPts val="1690"/>
+              </a:lnSpc>
+              <a:defRPr sz="1300">
+                <a:solidFill>
+                  <a:srgbClr val="1A1A1A"/>
+                </a:solidFill>
+              </a:defRPr>
+            </a:pPr>
+            <a:r>
+              <a:t>Daily budget:     100 descriptions/day (via --limit 100 in daily_load.bat)</a:t>
+            </a:r>
+          </a:p>
+          <a:p>
+            <a:pPr>
+              <a:lnSpc>
+                <a:spcPts val="1690"/>
+              </a:lnSpc>
+              <a:defRPr sz="1300">
+                <a:solidFill>
+                  <a:srgbClr val="1A1A1A"/>
+                </a:solidFill>
+              </a:defRPr>
+            </a:pPr>
+            <a:r>
+              <a:t>CLI command:      python main.py update fetch-descriptions [--key 2] [--limit 100]</a:t>
+            </a:r>
+          </a:p>
+          <a:p>
+            <a:pPr>
+              <a:lnSpc>
+                <a:spcPts val="1690"/>
+              </a:lnSpc>
+              <a:defRPr sz="1300">
+                <a:solidFill>
+                  <a:srgbClr val="1A1A1A"/>
+                </a:solidFill>
+              </a:defRPr>
+            </a:pPr>
+          </a:p>
+          <a:p>
+            <a:pPr>
+              <a:lnSpc>
+                <a:spcPts val="1690"/>
               </a:lnSpc>
               <a:spcBef>
                 <a:spcPts val="1400"/>
@@ -5587,82 +5573,82 @@
               </a:defRPr>
             </a:pPr>
             <a:r>
-              <a:t>Architecture</a:t>
-            </a:r>
-          </a:p>
-          <a:p>
-            <a:pPr>
-              <a:lnSpc>
-                <a:spcPts val="1959"/>
-              </a:lnSpc>
-              <a:defRPr sz="1400">
-                <a:solidFill>
-                  <a:srgbClr val="1A1A1A"/>
-                </a:solidFill>
-              </a:defRPr>
-            </a:pPr>
-          </a:p>
-          <a:p>
-            <a:pPr>
-              <a:lnSpc>
-                <a:spcPts val="1959"/>
-              </a:lnSpc>
-              <a:defRPr sz="1400">
-                <a:solidFill>
-                  <a:srgbClr val="1A1A1A"/>
-                </a:solidFill>
-              </a:defRPr>
-            </a:pPr>
-            <a:r>
-              <a:t>Decoupled design: C# API writes request, Python processor reads and executes</a:t>
-            </a:r>
-          </a:p>
-          <a:p>
-            <a:pPr>
-              <a:lnSpc>
-                <a:spcPts val="1959"/>
-              </a:lnSpc>
-              <a:defRPr sz="1400">
-                <a:solidFill>
-                  <a:srgbClr val="1A1A1A"/>
-                </a:solidFill>
-              </a:defRPr>
-            </a:pPr>
-            <a:r>
-              <a:t>Reuses existing ETL loaders -- no duplicate data transformation logic</a:t>
-            </a:r>
-          </a:p>
-          <a:p>
-            <a:pPr>
-              <a:lnSpc>
-                <a:spcPts val="1959"/>
-              </a:lnSpc>
-              <a:defRPr sz="1400">
-                <a:solidFill>
-                  <a:srgbClr val="1A1A1A"/>
-                </a:solidFill>
-              </a:defRPr>
-            </a:pPr>
-            <a:r>
-              <a:t>Error handling: per-request try/catch, failed requests logged with error message</a:t>
-            </a:r>
-          </a:p>
-          <a:p>
-            <a:pPr>
-              <a:lnSpc>
-                <a:spcPts val="1959"/>
-              </a:lnSpc>
-              <a:defRPr sz="1400">
-                <a:solidFill>
-                  <a:srgbClr val="1A1A1A"/>
-                </a:solidFill>
-              </a:defRPr>
-            </a:pPr>
-          </a:p>
-          <a:p>
-            <a:pPr>
-              <a:lnSpc>
-                <a:spcPts val="1959"/>
+              <a:t>Priority Strategy</a:t>
+            </a:r>
+          </a:p>
+          <a:p>
+            <a:pPr>
+              <a:lnSpc>
+                <a:spcPts val="1690"/>
+              </a:lnSpc>
+              <a:defRPr sz="1300">
+                <a:solidFill>
+                  <a:srgbClr val="1A1A1A"/>
+                </a:solidFill>
+              </a:defRPr>
+            </a:pPr>
+          </a:p>
+          <a:p>
+            <a:pPr>
+              <a:lnSpc>
+                <a:spcPts val="1690"/>
+              </a:lnSpc>
+              <a:defRPr sz="1300">
+                <a:solidFill>
+                  <a:srgbClr val="1A1A1A"/>
+                </a:solidFill>
+              </a:defRPr>
+            </a:pPr>
+            <a:r>
+              <a:t>High-value first: --naics and --set-aside filters identify WOSB/8(a)/SBA opportunities</a:t>
+            </a:r>
+          </a:p>
+          <a:p>
+            <a:pPr>
+              <a:lnSpc>
+                <a:spcPts val="1690"/>
+              </a:lnSpc>
+              <a:defRPr sz="1300">
+                <a:solidFill>
+                  <a:srgbClr val="1A1A1A"/>
+                </a:solidFill>
+              </a:defRPr>
+            </a:pPr>
+            <a:r>
+              <a:t>Remaining budget: after priority pass, fetches general backlog</a:t>
+            </a:r>
+          </a:p>
+          <a:p>
+            <a:pPr>
+              <a:lnSpc>
+                <a:spcPts val="1690"/>
+              </a:lnSpc>
+              <a:defRPr sz="1300">
+                <a:solidFill>
+                  <a:srgbClr val="1A1A1A"/>
+                </a:solidFill>
+              </a:defRPr>
+            </a:pPr>
+            <a:r>
+              <a:t>Integrated:       Step 2 of daily_load.bat (after opportunity load, before awards)</a:t>
+            </a:r>
+          </a:p>
+          <a:p>
+            <a:pPr>
+              <a:lnSpc>
+                <a:spcPts val="1690"/>
+              </a:lnSpc>
+              <a:defRPr sz="1300">
+                <a:solidFill>
+                  <a:srgbClr val="1A1A1A"/>
+                </a:solidFill>
+              </a:defRPr>
+            </a:pPr>
+          </a:p>
+          <a:p>
+            <a:pPr>
+              <a:lnSpc>
+                <a:spcPts val="1690"/>
               </a:lnSpc>
               <a:spcBef>
                 <a:spcPts val="400"/>
@@ -5674,7 +5660,550 @@
               </a:defRPr>
             </a:pPr>
             <a:r>
-              <a:t>Enables users to trigger targeted data refreshes without running full ETL pipelines.</a:t>
+              <a:t>One API call per description. Rate-limited by Key 2 daily quota.</a:t>
+            </a:r>
+          </a:p>
+          <a:p>
+            <a:pPr>
+              <a:lnSpc>
+                <a:spcPts val="1690"/>
+              </a:lnSpc>
+              <a:spcBef>
+                <a:spcPts val="400"/>
+              </a:spcBef>
+              <a:defRPr sz="1200" i="1">
+                <a:solidFill>
+                  <a:srgbClr val="666666"/>
+                </a:solidFill>
+              </a:defRPr>
+            </a:pPr>
+            <a:r>
+              <a:t>Backlog clears over days/weeks as 100/day accumulates.</a:t>
+            </a:r>
+          </a:p>
+        </p:txBody>
+      </p:sp>
+    </p:spTree>
+  </p:cSld>
+  <p:clrMapOvr>
+    <a:masterClrMapping/>
+  </p:clrMapOvr>
+</p:sld>
+</file>
+
+<file path=ppt/slides/slide7.xml><?xml version="1.0" encoding="utf-8"?>
+<p:sld xmlns:a="http://schemas.openxmlformats.org/drawingml/2006/main" xmlns:p="http://schemas.openxmlformats.org/presentationml/2006/main" xmlns:r="http://schemas.openxmlformats.org/officeDocument/2006/relationships">
+  <p:cSld>
+    <p:spTree>
+      <p:nvGrpSpPr>
+        <p:cNvPr id="1" name=""/>
+        <p:cNvGrpSpPr/>
+        <p:nvPr/>
+      </p:nvGrpSpPr>
+      <p:grpSpPr/>
+      <p:sp>
+        <p:nvSpPr>
+          <p:cNvPr id="2" name="Rectangle 1"/>
+          <p:cNvSpPr/>
+          <p:nvPr/>
+        </p:nvSpPr>
+        <p:spPr>
+          <a:xfrm>
+            <a:off x="0" y="0"/>
+            <a:ext cx="12191695" cy="914400"/>
+          </a:xfrm>
+          <a:prstGeom prst="rect">
+            <a:avLst/>
+          </a:prstGeom>
+          <a:solidFill>
+            <a:srgbClr val="002B5C"/>
+          </a:solidFill>
+          <a:ln>
+            <a:noFill/>
+          </a:ln>
+        </p:spPr>
+        <p:style>
+          <a:lnRef idx="1">
+            <a:schemeClr val="accent1"/>
+          </a:lnRef>
+          <a:fillRef idx="3">
+            <a:schemeClr val="accent1"/>
+          </a:fillRef>
+          <a:effectRef idx="2">
+            <a:schemeClr val="accent1"/>
+          </a:effectRef>
+          <a:fontRef idx="minor">
+            <a:schemeClr val="lt1"/>
+          </a:fontRef>
+        </p:style>
+        <p:txBody>
+          <a:bodyPr rtlCol="0" anchor="ctr" wrap="square" lIns="457200" tIns="182880"/>
+          <a:lstStyle/>
+          <a:p>
+            <a:pPr algn="l">
+              <a:defRPr sz="2800" b="1">
+                <a:solidFill>
+                  <a:srgbClr val="FFFFFF"/>
+                </a:solidFill>
+              </a:defRPr>
+            </a:pPr>
+            <a:r>
+              <a:t>On-Demand Loading (UI-Triggered)</a:t>
+            </a:r>
+          </a:p>
+        </p:txBody>
+      </p:sp>
+      <p:sp>
+        <p:nvSpPr>
+          <p:cNvPr id="3" name="TextBox 2"/>
+          <p:cNvSpPr txBox="1"/>
+          <p:nvPr/>
+        </p:nvSpPr>
+        <p:spPr>
+          <a:xfrm>
+            <a:off x="457200" y="1005840"/>
+            <a:ext cx="11277295" cy="5486400"/>
+          </a:xfrm>
+          <a:prstGeom prst="rect">
+            <a:avLst/>
+          </a:prstGeom>
+          <a:noFill/>
+        </p:spPr>
+        <p:txBody>
+          <a:bodyPr wrap="square">
+            <a:spAutoFit/>
+          </a:bodyPr>
+          <a:lstStyle/>
+          <a:p>
+            <a:pPr>
+              <a:lnSpc>
+                <a:spcPts val="1690"/>
+              </a:lnSpc>
+              <a:spcBef>
+                <a:spcPts val="1400"/>
+              </a:spcBef>
+              <a:defRPr sz="1600" b="1">
+                <a:solidFill>
+                  <a:srgbClr val="006EB8"/>
+                </a:solidFill>
+              </a:defRPr>
+            </a:pPr>
+            <a:r>
+              <a:t>Data Flow</a:t>
+            </a:r>
+          </a:p>
+          <a:p>
+            <a:pPr>
+              <a:lnSpc>
+                <a:spcPts val="1690"/>
+              </a:lnSpc>
+              <a:defRPr sz="1300">
+                <a:solidFill>
+                  <a:srgbClr val="1A1A1A"/>
+                </a:solidFill>
+              </a:defRPr>
+            </a:pPr>
+          </a:p>
+          <a:p>
+            <a:pPr>
+              <a:lnSpc>
+                <a:spcPts val="1690"/>
+              </a:lnSpc>
+              <a:defRPr sz="1300">
+                <a:solidFill>
+                  <a:srgbClr val="1A1A1A"/>
+                </a:solidFill>
+              </a:defRPr>
+            </a:pPr>
+            <a:r>
+              <a:t>React UI button click  --&gt;  C# API POST /data-load-requests</a:t>
+            </a:r>
+          </a:p>
+          <a:p>
+            <a:pPr lvl="1">
+              <a:lnSpc>
+                <a:spcPts val="1690"/>
+              </a:lnSpc>
+              <a:defRPr sz="1200">
+                <a:solidFill>
+                  <a:srgbClr val="1A1A1A"/>
+                </a:solidFill>
+              </a:defRPr>
+            </a:pPr>
+            <a:r>
+              <a:t>--&gt; INSERT into data_load_request (status = PENDING)</a:t>
+            </a:r>
+          </a:p>
+          <a:p>
+            <a:pPr lvl="1">
+              <a:lnSpc>
+                <a:spcPts val="1690"/>
+              </a:lnSpc>
+              <a:defRPr sz="1200">
+                <a:solidFill>
+                  <a:srgbClr val="1A1A1A"/>
+                </a:solidFill>
+              </a:defRPr>
+            </a:pPr>
+            <a:r>
+              <a:t>--&gt; Python DemandLoader polls for PENDING rows (up to 10 per cycle)</a:t>
+            </a:r>
+          </a:p>
+          <a:p>
+            <a:pPr lvl="1">
+              <a:lnSpc>
+                <a:spcPts val="1690"/>
+              </a:lnSpc>
+              <a:defRPr sz="1200">
+                <a:solidFill>
+                  <a:srgbClr val="1A1A1A"/>
+                </a:solidFill>
+              </a:defRPr>
+            </a:pPr>
+            <a:r>
+              <a:t>--&gt; Route to appropriate loader based on request_type:</a:t>
+            </a:r>
+          </a:p>
+          <a:p>
+            <a:pPr lvl="1">
+              <a:lnSpc>
+                <a:spcPts val="1690"/>
+              </a:lnSpc>
+              <a:defRPr sz="1200">
+                <a:solidFill>
+                  <a:srgbClr val="1A1A1A"/>
+                </a:solidFill>
+              </a:defRPr>
+            </a:pPr>
+            <a:r>
+              <a:t>USASPENDING_AWARD   --&gt;  USASpendingClient + USASpendingLoader</a:t>
+            </a:r>
+          </a:p>
+          <a:p>
+            <a:pPr lvl="1">
+              <a:lnSpc>
+                <a:spcPts val="1690"/>
+              </a:lnSpc>
+              <a:defRPr sz="1200">
+                <a:solidFill>
+                  <a:srgbClr val="1A1A1A"/>
+                </a:solidFill>
+              </a:defRPr>
+            </a:pPr>
+            <a:r>
+              <a:t>FPDS_AWARD          --&gt;  SAMAwardsClient (key 2) + AwardsLoader</a:t>
+            </a:r>
+          </a:p>
+          <a:p>
+            <a:pPr lvl="1">
+              <a:lnSpc>
+                <a:spcPts val="1690"/>
+              </a:lnSpc>
+              <a:defRPr sz="1200">
+                <a:solidFill>
+                  <a:srgbClr val="1A1A1A"/>
+                </a:solidFill>
+              </a:defRPr>
+            </a:pPr>
+            <a:r>
+              <a:t>REFRESH_FEDHIER_ORG --&gt;  SAMFedHierClient + FedHierLoader (single org)</a:t>
+            </a:r>
+          </a:p>
+          <a:p>
+            <a:pPr lvl="1">
+              <a:lnSpc>
+                <a:spcPts val="1690"/>
+              </a:lnSpc>
+              <a:defRPr sz="1200">
+                <a:solidFill>
+                  <a:srgbClr val="1A1A1A"/>
+                </a:solidFill>
+              </a:defRPr>
+            </a:pPr>
+            <a:r>
+              <a:t>ATTACHMENT_ANALYSIS --&gt;  Local AI analysis pipeline</a:t>
+            </a:r>
+          </a:p>
+          <a:p>
+            <a:pPr lvl="1">
+              <a:lnSpc>
+                <a:spcPts val="1690"/>
+              </a:lnSpc>
+              <a:defRPr sz="1200">
+                <a:solidFill>
+                  <a:srgbClr val="1A1A1A"/>
+                </a:solidFill>
+              </a:defRPr>
+            </a:pPr>
+            <a:r>
+              <a:t>--&gt; UPDATE data_load_request (status = COMPLETED / FAILED)</a:t>
+            </a:r>
+          </a:p>
+          <a:p>
+            <a:pPr>
+              <a:lnSpc>
+                <a:spcPts val="1690"/>
+              </a:lnSpc>
+              <a:defRPr sz="1300">
+                <a:solidFill>
+                  <a:srgbClr val="1A1A1A"/>
+                </a:solidFill>
+              </a:defRPr>
+            </a:pPr>
+          </a:p>
+          <a:p>
+            <a:pPr>
+              <a:lnSpc>
+                <a:spcPts val="1690"/>
+              </a:lnSpc>
+              <a:spcBef>
+                <a:spcPts val="1400"/>
+              </a:spcBef>
+              <a:defRPr sz="1600" b="1">
+                <a:solidFill>
+                  <a:srgbClr val="006EB8"/>
+                </a:solidFill>
+              </a:defRPr>
+            </a:pPr>
+            <a:r>
+              <a:t>Key Details</a:t>
+            </a:r>
+          </a:p>
+          <a:p>
+            <a:pPr>
+              <a:lnSpc>
+                <a:spcPts val="1690"/>
+              </a:lnSpc>
+              <a:defRPr sz="1300">
+                <a:solidFill>
+                  <a:srgbClr val="1A1A1A"/>
+                </a:solidFill>
+              </a:defRPr>
+            </a:pPr>
+          </a:p>
+          <a:p>
+            <a:pPr>
+              <a:lnSpc>
+                <a:spcPts val="1690"/>
+              </a:lnSpc>
+              <a:defRPr sz="1300">
+                <a:solidFill>
+                  <a:srgbClr val="1A1A1A"/>
+                </a:solidFill>
+              </a:defRPr>
+            </a:pPr>
+            <a:r>
+              <a:t>Request table:    data_load_request (PK: request_id)</a:t>
+            </a:r>
+          </a:p>
+          <a:p>
+            <a:pPr>
+              <a:lnSpc>
+                <a:spcPts val="1690"/>
+              </a:lnSpc>
+              <a:defRPr sz="1300">
+                <a:solidFill>
+                  <a:srgbClr val="1A1A1A"/>
+                </a:solidFill>
+              </a:defRPr>
+            </a:pPr>
+            <a:r>
+              <a:t>Status values:    PENDING -&gt; PROCESSING -&gt; COMPLETED | FAILED</a:t>
+            </a:r>
+          </a:p>
+          <a:p>
+            <a:pPr>
+              <a:lnSpc>
+                <a:spcPts val="1690"/>
+              </a:lnSpc>
+              <a:defRPr sz="1300">
+                <a:solidFill>
+                  <a:srgbClr val="1A1A1A"/>
+                </a:solidFill>
+              </a:defRPr>
+            </a:pPr>
+            <a:r>
+              <a:t>Polling:          Python CLI process, periodic poll cycle</a:t>
+            </a:r>
+          </a:p>
+          <a:p>
+            <a:pPr>
+              <a:lnSpc>
+                <a:spcPts val="1690"/>
+              </a:lnSpc>
+              <a:defRPr sz="1300">
+                <a:solidFill>
+                  <a:srgbClr val="1A1A1A"/>
+                </a:solidFill>
+              </a:defRPr>
+            </a:pPr>
+            <a:r>
+              <a:t>API key:          SAM.gov key 2 (1000/day) for FPDS + Fed Hierarchy lookups</a:t>
+            </a:r>
+          </a:p>
+          <a:p>
+            <a:pPr>
+              <a:lnSpc>
+                <a:spcPts val="1690"/>
+              </a:lnSpc>
+              <a:defRPr sz="1300">
+                <a:solidFill>
+                  <a:srgbClr val="1A1A1A"/>
+                </a:solidFill>
+              </a:defRPr>
+            </a:pPr>
+            <a:r>
+              <a:t>CLI command:      python main.py job process-requests [--watch]</a:t>
+            </a:r>
+          </a:p>
+          <a:p>
+            <a:pPr>
+              <a:lnSpc>
+                <a:spcPts val="1690"/>
+              </a:lnSpc>
+              <a:defRPr sz="1300">
+                <a:solidFill>
+                  <a:srgbClr val="1A1A1A"/>
+                </a:solidFill>
+              </a:defRPr>
+            </a:pPr>
+          </a:p>
+          <a:p>
+            <a:pPr>
+              <a:lnSpc>
+                <a:spcPts val="1690"/>
+              </a:lnSpc>
+              <a:spcBef>
+                <a:spcPts val="1400"/>
+              </a:spcBef>
+              <a:defRPr sz="1600" b="1">
+                <a:solidFill>
+                  <a:srgbClr val="006EB8"/>
+                </a:solidFill>
+              </a:defRPr>
+            </a:pPr>
+            <a:r>
+              <a:t>Request Types</a:t>
+            </a:r>
+          </a:p>
+          <a:p>
+            <a:pPr>
+              <a:lnSpc>
+                <a:spcPts val="1690"/>
+              </a:lnSpc>
+              <a:defRPr sz="1300">
+                <a:solidFill>
+                  <a:srgbClr val="1A1A1A"/>
+                </a:solidFill>
+              </a:defRPr>
+            </a:pPr>
+          </a:p>
+          <a:p>
+            <a:pPr>
+              <a:lnSpc>
+                <a:spcPts val="1690"/>
+              </a:lnSpc>
+              <a:defRPr sz="1300">
+                <a:solidFill>
+                  <a:srgbClr val="1A1A1A"/>
+                </a:solidFill>
+              </a:defRPr>
+            </a:pPr>
+            <a:r>
+              <a:t>USASPENDING_AWARD:   Fetch award + transactions by generated_unique_award_id</a:t>
+            </a:r>
+          </a:p>
+          <a:p>
+            <a:pPr>
+              <a:lnSpc>
+                <a:spcPts val="1690"/>
+              </a:lnSpc>
+              <a:defRPr sz="1300">
+                <a:solidFill>
+                  <a:srgbClr val="1A1A1A"/>
+                </a:solidFill>
+              </a:defRPr>
+            </a:pPr>
+            <a:r>
+              <a:t>FPDS_AWARD:          Fetch FPDS contract data by PIID</a:t>
+            </a:r>
+          </a:p>
+          <a:p>
+            <a:pPr>
+              <a:lnSpc>
+                <a:spcPts val="1690"/>
+              </a:lnSpc>
+              <a:defRPr sz="1300">
+                <a:solidFill>
+                  <a:srgbClr val="1A1A1A"/>
+                </a:solidFill>
+              </a:defRPr>
+            </a:pPr>
+            <a:r>
+              <a:t>REFRESH_FEDHIER_ORG: Refresh single agency/office from SAM.gov Fed Hierarchy API</a:t>
+            </a:r>
+          </a:p>
+          <a:p>
+            <a:pPr>
+              <a:lnSpc>
+                <a:spcPts val="1690"/>
+              </a:lnSpc>
+              <a:defRPr sz="1300">
+                <a:solidFill>
+                  <a:srgbClr val="1A1A1A"/>
+                </a:solidFill>
+              </a:defRPr>
+            </a:pPr>
+            <a:r>
+              <a:t>ATTACHMENT_ANALYSIS: Run AI analysis on attachments for a specific notice_id</a:t>
+            </a:r>
+          </a:p>
+          <a:p>
+            <a:pPr>
+              <a:lnSpc>
+                <a:spcPts val="1690"/>
+              </a:lnSpc>
+              <a:defRPr sz="1300">
+                <a:solidFill>
+                  <a:srgbClr val="1A1A1A"/>
+                </a:solidFill>
+              </a:defRPr>
+            </a:pPr>
+          </a:p>
+          <a:p>
+            <a:pPr>
+              <a:lnSpc>
+                <a:spcPts val="1690"/>
+              </a:lnSpc>
+              <a:spcBef>
+                <a:spcPts val="400"/>
+              </a:spcBef>
+              <a:defRPr sz="1200" i="1">
+                <a:solidFill>
+                  <a:srgbClr val="666666"/>
+                </a:solidFill>
+              </a:defRPr>
+            </a:pPr>
+            <a:r>
+              <a:t>Decoupled: C# API writes request, Python processor reads and executes.</a:t>
+            </a:r>
+          </a:p>
+          <a:p>
+            <a:pPr>
+              <a:lnSpc>
+                <a:spcPts val="1690"/>
+              </a:lnSpc>
+              <a:spcBef>
+                <a:spcPts val="400"/>
+              </a:spcBef>
+              <a:defRPr sz="1200" i="1">
+                <a:solidFill>
+                  <a:srgbClr val="666666"/>
+                </a:solidFill>
+              </a:defRPr>
+            </a:pPr>
+            <a:r>
+              <a:t>Reuses existing loaders -- no duplicate transformation logic.</a:t>
             </a:r>
           </a:p>
         </p:txBody>
